--- a/ai-agent-terms-full-talk.pptx
+++ b/ai-agent-terms-full-talk.pptx
@@ -5,7 +5,7 @@
     <p:sldMasterId id="2147483648" r:id="rId1"/>
   </p:sldMasterIdLst>
   <p:notesMasterIdLst>
-    <p:notesMasterId r:id="rId46"/>
+    <p:notesMasterId r:id="rId49"/>
   </p:notesMasterIdLst>
   <p:sldIdLst>
     <p:sldId id="256" r:id="rId2"/>
@@ -50,8 +50,11 @@
     <p:sldId id="315" r:id="rId41"/>
     <p:sldId id="326" r:id="rId42"/>
     <p:sldId id="327" r:id="rId43"/>
-    <p:sldId id="330" r:id="rId44"/>
-    <p:sldId id="313" r:id="rId45"/>
+    <p:sldId id="332" r:id="rId44"/>
+    <p:sldId id="333" r:id="rId45"/>
+    <p:sldId id="330" r:id="rId46"/>
+    <p:sldId id="331" r:id="rId47"/>
+    <p:sldId id="313" r:id="rId48"/>
   </p:sldIdLst>
   <p:sldSz cx="12192000" cy="6858000"/>
   <p:notesSz cx="6858000" cy="9144000"/>
@@ -4322,6 +4325,224 @@
             <p:ph type="sldImg"/>
           </p:nvPr>
         </p:nvSpPr>
+        <p:spPr/>
+      </p:sp>
+      <p:sp>
+        <p:nvSpPr>
+          <p:cNvPr id="3" name="Notes Placeholder 2"/>
+          <p:cNvSpPr>
+            <a:spLocks noGrp="1"/>
+          </p:cNvSpPr>
+          <p:nvPr>
+            <p:ph type="body" idx="1"/>
+          </p:nvPr>
+        </p:nvSpPr>
+        <p:spPr/>
+        <p:txBody>
+          <a:bodyPr/>
+          <a:lstStyle/>
+          <a:p>
+            <a:endParaRPr lang="en-GB" dirty="0"/>
+          </a:p>
+        </p:txBody>
+      </p:sp>
+      <p:sp>
+        <p:nvSpPr>
+          <p:cNvPr id="4" name="Slide Number Placeholder 3"/>
+          <p:cNvSpPr>
+            <a:spLocks noGrp="1"/>
+          </p:cNvSpPr>
+          <p:nvPr>
+            <p:ph type="sldNum" sz="quarter" idx="5"/>
+          </p:nvPr>
+        </p:nvSpPr>
+        <p:spPr/>
+        <p:txBody>
+          <a:bodyPr/>
+          <a:lstStyle/>
+          <a:p>
+            <a:endParaRPr lang="en-US"/>
+          </a:p>
+        </p:txBody>
+      </p:sp>
+    </p:spTree>
+    <p:extLst>
+      <p:ext uri="{BB962C8B-B14F-4D97-AF65-F5344CB8AC3E}">
+        <p14:creationId xmlns:p14="http://schemas.microsoft.com/office/powerpoint/2010/main" val="991741038"/>
+      </p:ext>
+    </p:extLst>
+  </p:cSld>
+  <p:clrMapOvr>
+    <a:masterClrMapping/>
+  </p:clrMapOvr>
+</p:notes>
+</file>
+
+<file path=ppt/notesSlides/notesSlide44.xml><?xml version="1.0" encoding="utf-8"?>
+<p:notes xmlns:a="http://schemas.openxmlformats.org/drawingml/2006/main" xmlns:r="http://schemas.openxmlformats.org/officeDocument/2006/relationships" xmlns:p="http://schemas.openxmlformats.org/presentationml/2006/main">
+  <p:cSld>
+    <p:spTree>
+      <p:nvGrpSpPr>
+        <p:cNvPr id="1" name=""/>
+        <p:cNvGrpSpPr/>
+        <p:nvPr/>
+      </p:nvGrpSpPr>
+      <p:grpSpPr>
+        <a:xfrm>
+          <a:off x="0" y="0"/>
+          <a:ext cx="0" cy="0"/>
+          <a:chOff x="0" y="0"/>
+          <a:chExt cx="0" cy="0"/>
+        </a:xfrm>
+      </p:grpSpPr>
+      <p:sp>
+        <p:nvSpPr>
+          <p:cNvPr id="2" name="Slide Image Placeholder 1"/>
+          <p:cNvSpPr>
+            <a:spLocks noGrp="1" noRot="1" noChangeAspect="1"/>
+          </p:cNvSpPr>
+          <p:nvPr>
+            <p:ph type="sldImg"/>
+          </p:nvPr>
+        </p:nvSpPr>
+        <p:spPr/>
+      </p:sp>
+      <p:sp>
+        <p:nvSpPr>
+          <p:cNvPr id="3" name="Notes Placeholder 2"/>
+          <p:cNvSpPr>
+            <a:spLocks noGrp="1"/>
+          </p:cNvSpPr>
+          <p:nvPr>
+            <p:ph type="body" idx="1"/>
+          </p:nvPr>
+        </p:nvSpPr>
+        <p:spPr/>
+        <p:txBody>
+          <a:bodyPr/>
+          <a:lstStyle/>
+          <a:p>
+            <a:r>
+              <a:rPr lang="en-US" dirty="0"/>
+              <a:t>The diagram splits an AI agent into its two constituent parts: the model and the harness wrapped around it. </a:t>
+            </a:r>
+          </a:p>
+          <a:p>
+            <a:endParaRPr lang="en-US" dirty="0"/>
+          </a:p>
+          <a:p>
+            <a:r>
+              <a:rPr lang="en-US" dirty="0"/>
+              <a:t>The model is just the neural network — capable, but unable to open a file, execute code, or reach the web by itself, which is the brain-in-a-jar framing. </a:t>
+            </a:r>
+          </a:p>
+          <a:p>
+            <a:endParaRPr lang="en-US" dirty="0"/>
+          </a:p>
+          <a:p>
+            <a:r>
+              <a:rPr lang="en-US" dirty="0"/>
+              <a:t>The harness supplies three things: </a:t>
+            </a:r>
+          </a:p>
+          <a:p>
+            <a:endParaRPr lang="en-US" dirty="0"/>
+          </a:p>
+          <a:p>
+            <a:r>
+              <a:rPr lang="en-US" dirty="0"/>
+              <a:t>tools (file access, code execution in a sandbox, browsing, computer use, and MCP for services that don't live on the machine), </a:t>
+            </a:r>
+          </a:p>
+          <a:p>
+            <a:endParaRPr lang="en-US" dirty="0"/>
+          </a:p>
+          <a:p>
+            <a:r>
+              <a:rPr lang="en-US" dirty="0"/>
+              <a:t>memory (instruction files like AGENTS.md, context compaction as the window fills, and search so only relevant code gets pulled in), </a:t>
+            </a:r>
+          </a:p>
+          <a:p>
+            <a:endParaRPr lang="en-US" dirty="0"/>
+          </a:p>
+          <a:p>
+            <a:r>
+              <a:rPr lang="en-US" dirty="0"/>
+              <a:t>and the agentic loop where the model plans, the harness acts, results come back, and the cycle repeats for seconds or hours. Verification runs throughout that loop rather than at the end — tests as it goes, screenshots, sometimes a separate model acting as reviewer — which is what lets a run go long without drifting off course. The reason this distinction matters is in the caption: benchmark gaps between the top labs have narrowed to a few points, so when one product clearly outperforms another on the same model, the harness is usually the explanation. </a:t>
+            </a:r>
+          </a:p>
+          <a:p>
+            <a:endParaRPr lang="en-US" dirty="0"/>
+          </a:p>
+          <a:p>
+            <a:r>
+              <a:rPr lang="en-US" dirty="0"/>
+              <a:t>The boundary is also fluid, since long-horizon planning and self-verification are increasingly trained into the models themselves, while consistency across a long task is increasingly shaped by harness conventions and project files.</a:t>
+            </a:r>
+            <a:endParaRPr lang="en-GB" dirty="0"/>
+          </a:p>
+        </p:txBody>
+      </p:sp>
+      <p:sp>
+        <p:nvSpPr>
+          <p:cNvPr id="4" name="Slide Number Placeholder 3"/>
+          <p:cNvSpPr>
+            <a:spLocks noGrp="1"/>
+          </p:cNvSpPr>
+          <p:nvPr>
+            <p:ph type="sldNum" sz="quarter" idx="5"/>
+          </p:nvPr>
+        </p:nvSpPr>
+        <p:spPr/>
+        <p:txBody>
+          <a:bodyPr/>
+          <a:lstStyle/>
+          <a:p>
+            <a:endParaRPr lang="en-US"/>
+          </a:p>
+        </p:txBody>
+      </p:sp>
+    </p:spTree>
+    <p:extLst>
+      <p:ext uri="{BB962C8B-B14F-4D97-AF65-F5344CB8AC3E}">
+        <p14:creationId xmlns:p14="http://schemas.microsoft.com/office/powerpoint/2010/main" val="3837730058"/>
+      </p:ext>
+    </p:extLst>
+  </p:cSld>
+  <p:clrMapOvr>
+    <a:masterClrMapping/>
+  </p:clrMapOvr>
+</p:notes>
+</file>
+
+<file path=ppt/notesSlides/notesSlide45.xml><?xml version="1.0" encoding="utf-8"?>
+<p:notes xmlns:a="http://schemas.openxmlformats.org/drawingml/2006/main" xmlns:r="http://schemas.openxmlformats.org/officeDocument/2006/relationships" xmlns:p="http://schemas.openxmlformats.org/presentationml/2006/main">
+  <p:cSld>
+    <p:spTree>
+      <p:nvGrpSpPr>
+        <p:cNvPr id="1" name=""/>
+        <p:cNvGrpSpPr/>
+        <p:nvPr/>
+      </p:nvGrpSpPr>
+      <p:grpSpPr>
+        <a:xfrm>
+          <a:off x="0" y="0"/>
+          <a:ext cx="0" cy="0"/>
+          <a:chOff x="0" y="0"/>
+          <a:chExt cx="0" cy="0"/>
+        </a:xfrm>
+      </p:grpSpPr>
+      <p:sp>
+        <p:nvSpPr>
+          <p:cNvPr id="2" name="Slide Image Placeholder 1"/>
+          <p:cNvSpPr>
+            <a:spLocks noGrp="1" noRot="1" noChangeAspect="1"/>
+          </p:cNvSpPr>
+          <p:nvPr>
+            <p:ph type="sldImg"/>
+          </p:nvPr>
+        </p:nvSpPr>
         <p:spPr>
           <a:xfrm>
             <a:off x="685800" y="1143000"/>
@@ -4360,6 +4581,109 @@
         <p:txBody>
           <a:bodyPr/>
           <a:lstStyle/>
+          <a:p>
+            <a:r>
+              <a:rPr lang="en-GB" dirty="0" err="1"/>
+              <a:t>bodyLimitBytes</a:t>
+            </a:r>
+            <a:r>
+              <a:rPr lang="en-GB" dirty="0"/>
+              <a:t>, </a:t>
+            </a:r>
+            <a:r>
+              <a:rPr lang="en-GB" dirty="0" err="1"/>
+              <a:t>jsonMaxKeys</a:t>
+            </a:r>
+            <a:r>
+              <a:rPr lang="en-GB" dirty="0"/>
+              <a:t>, </a:t>
+            </a:r>
+            <a:r>
+              <a:rPr lang="en-GB" dirty="0" err="1"/>
+              <a:t>jsonMaxDepth</a:t>
+            </a:r>
+            <a:r>
+              <a:rPr lang="en-GB" dirty="0"/>
+              <a:t>, </a:t>
+            </a:r>
+            <a:r>
+              <a:rPr lang="en-GB" dirty="0" err="1"/>
+              <a:t>requestTimeoutMs</a:t>
+            </a:r>
+            <a:r>
+              <a:rPr lang="en-GB" dirty="0"/>
+              <a:t>, </a:t>
+            </a:r>
+            <a:r>
+              <a:rPr lang="en-GB" dirty="0" err="1"/>
+              <a:t>secureHeaders</a:t>
+            </a:r>
+            <a:r>
+              <a:rPr lang="en-GB" dirty="0"/>
+              <a:t> + </a:t>
+            </a:r>
+            <a:r>
+              <a:rPr lang="en-GB" dirty="0" err="1"/>
+              <a:t>maxHeaderCount</a:t>
+            </a:r>
+            <a:r>
+              <a:rPr lang="en-GB" dirty="0"/>
+              <a:t>, RFC 9457 </a:t>
+            </a:r>
+            <a:r>
+              <a:rPr lang="en-GB" dirty="0" err="1"/>
+              <a:t>problem+json</a:t>
+            </a:r>
+            <a:r>
+              <a:rPr lang="en-GB" dirty="0"/>
+              <a:t> which is reduction or auto strip detail from 5xx.</a:t>
+            </a:r>
+          </a:p>
+          <a:p>
+            <a:endParaRPr lang="en-GB" dirty="0"/>
+          </a:p>
+          <a:p>
+            <a:r>
+              <a:rPr lang="en-GB" dirty="0"/>
+              <a:t>Server will refuse to run on </a:t>
+            </a:r>
+          </a:p>
+          <a:p>
+            <a:r>
+              <a:rPr lang="en-GB" dirty="0"/>
+              <a:t>wildcard CORS with credentials and anywhere</a:t>
+            </a:r>
+          </a:p>
+          <a:p>
+            <a:r>
+              <a:rPr lang="en-GB" dirty="0"/>
+              <a:t>a session secret under 32 bytes or a default placeholder</a:t>
+            </a:r>
+          </a:p>
+          <a:p>
+            <a:r>
+              <a:rPr lang="en-GB" dirty="0"/>
+              <a:t>sessions, a mutating route, and no CSRF hook</a:t>
+            </a:r>
+          </a:p>
+          <a:p>
+            <a:r>
+              <a:rPr lang="en-GB" dirty="0"/>
+              <a:t>proxy trust left unconfigured in production</a:t>
+            </a:r>
+          </a:p>
+          <a:p>
+            <a:r>
+              <a:rPr lang="en-GB" dirty="0"/>
+              <a:t>a symmetric algorithm handed to a JWKS verifier</a:t>
+            </a:r>
+          </a:p>
+          <a:p>
+            <a:r>
+              <a:rPr lang="en-GB" dirty="0"/>
+              <a:t>auth declared with no auth hook behind it</a:t>
+            </a:r>
+          </a:p>
           <a:p>
             <a:endParaRPr lang="en-GB" dirty="0"/>
           </a:p>
@@ -4378,7 +4702,128 @@
 </p:notes>
 </file>
 
-<file path=ppt/notesSlides/notesSlide44.xml><?xml version="1.0" encoding="utf-8"?>
+<file path=ppt/notesSlides/notesSlide46.xml><?xml version="1.0" encoding="utf-8"?>
+<p:notes xmlns:a="http://schemas.openxmlformats.org/drawingml/2006/main" xmlns:r="http://schemas.openxmlformats.org/officeDocument/2006/relationships" xmlns:p="http://schemas.openxmlformats.org/presentationml/2006/main">
+  <p:cSld>
+    <p:spTree>
+      <p:nvGrpSpPr>
+        <p:cNvPr id="1" name="">
+          <a:extLst>
+            <a:ext uri="{FF2B5EF4-FFF2-40B4-BE49-F238E27FC236}">
+              <a16:creationId xmlns:a16="http://schemas.microsoft.com/office/drawing/2014/main" id="{D11FA9EC-F1C4-8475-4C34-982AA7BE60A7}"/>
+            </a:ext>
+          </a:extLst>
+        </p:cNvPr>
+        <p:cNvGrpSpPr/>
+        <p:nvPr/>
+      </p:nvGrpSpPr>
+      <p:grpSpPr>
+        <a:xfrm>
+          <a:off x="0" y="0"/>
+          <a:ext cx="0" cy="0"/>
+          <a:chOff x="0" y="0"/>
+          <a:chExt cx="0" cy="0"/>
+        </a:xfrm>
+      </p:grpSpPr>
+      <p:sp>
+        <p:nvSpPr>
+          <p:cNvPr id="2" name="Slide Image Placeholder 1">
+            <a:extLst>
+              <a:ext uri="{FF2B5EF4-FFF2-40B4-BE49-F238E27FC236}">
+                <a16:creationId xmlns:a16="http://schemas.microsoft.com/office/drawing/2014/main" id="{9F28C641-A123-4973-51FA-0665B2813653}"/>
+              </a:ext>
+            </a:extLst>
+          </p:cNvPr>
+          <p:cNvSpPr>
+            <a:spLocks noGrp="1" noRot="1" noChangeAspect="1"/>
+          </p:cNvSpPr>
+          <p:nvPr>
+            <p:ph type="sldImg"/>
+          </p:nvPr>
+        </p:nvSpPr>
+        <p:spPr/>
+      </p:sp>
+      <p:sp>
+        <p:nvSpPr>
+          <p:cNvPr id="3" name="Notes Placeholder 2">
+            <a:extLst>
+              <a:ext uri="{FF2B5EF4-FFF2-40B4-BE49-F238E27FC236}">
+                <a16:creationId xmlns:a16="http://schemas.microsoft.com/office/drawing/2014/main" id="{AB824122-D8E6-13A2-EF59-883AC6891774}"/>
+              </a:ext>
+            </a:extLst>
+          </p:cNvPr>
+          <p:cNvSpPr>
+            <a:spLocks noGrp="1"/>
+          </p:cNvSpPr>
+          <p:nvPr>
+            <p:ph type="body" idx="1"/>
+          </p:nvPr>
+        </p:nvSpPr>
+        <p:spPr/>
+        <p:txBody>
+          <a:bodyPr/>
+          <a:lstStyle/>
+          <a:p>
+            <a:r>
+              <a:rPr lang="en-US" dirty="0"/>
+              <a:t>Knowledge atrophy, or cognitive atrophy, is the gradual decline of memory, critical thinking, and problem-solving skills caused by overreliance on AI tools like LLMs for mental work. </a:t>
+            </a:r>
+            <a:br>
+              <a:rPr lang="en-US" dirty="0"/>
+            </a:br>
+            <a:br>
+              <a:rPr lang="en-US" dirty="0"/>
+            </a:br>
+            <a:r>
+              <a:rPr lang="en-US" dirty="0"/>
+              <a:t>Keep learning the technical details of things that you are building. This will help you in the future in guiding agents to the right directions. It will save money because of lesser prompting. And lastly it will improve your skills</a:t>
+            </a:r>
+          </a:p>
+        </p:txBody>
+      </p:sp>
+      <p:sp>
+        <p:nvSpPr>
+          <p:cNvPr id="4" name="Slide Number Placeholder 3">
+            <a:extLst>
+              <a:ext uri="{FF2B5EF4-FFF2-40B4-BE49-F238E27FC236}">
+                <a16:creationId xmlns:a16="http://schemas.microsoft.com/office/drawing/2014/main" id="{876E6526-0A27-7059-0E06-088E9428FC92}"/>
+              </a:ext>
+            </a:extLst>
+          </p:cNvPr>
+          <p:cNvSpPr>
+            <a:spLocks noGrp="1"/>
+          </p:cNvSpPr>
+          <p:nvPr>
+            <p:ph type="sldNum" sz="quarter" idx="10"/>
+          </p:nvPr>
+        </p:nvSpPr>
+        <p:spPr/>
+        <p:txBody>
+          <a:bodyPr/>
+          <a:lstStyle/>
+          <a:p>
+            <a:fld id="{F7021451-1387-4CA6-816F-3879F97B5CBC}" type="slidenum">
+              <a:rPr lang="en-US"/>
+              <a:t>46</a:t>
+            </a:fld>
+            <a:endParaRPr lang="en-US"/>
+          </a:p>
+        </p:txBody>
+      </p:sp>
+    </p:spTree>
+    <p:extLst>
+      <p:ext uri="{BB962C8B-B14F-4D97-AF65-F5344CB8AC3E}">
+        <p14:creationId xmlns:p14="http://schemas.microsoft.com/office/powerpoint/2010/main" val="3486230722"/>
+      </p:ext>
+    </p:extLst>
+  </p:cSld>
+  <p:clrMapOvr>
+    <a:masterClrMapping/>
+  </p:clrMapOvr>
+</p:notes>
+</file>
+
+<file path=ppt/notesSlides/notesSlide47.xml><?xml version="1.0" encoding="utf-8"?>
 <p:notes xmlns:a="http://schemas.openxmlformats.org/drawingml/2006/main" xmlns:r="http://schemas.openxmlformats.org/officeDocument/2006/relationships" xmlns:p="http://schemas.openxmlformats.org/presentationml/2006/main">
   <p:cSld>
     <p:spTree>
@@ -5139,7 +5584,7 @@
           <a:p>
             <a:fld id="{5BCAD085-E8A6-8845-BD4E-CB4CCA059FC4}" type="datetimeFigureOut">
               <a:rPr lang="en-US" smtClean="0"/>
-              <a:t>8/29/2026</a:t>
+              <a:t>9/1/2026</a:t>
             </a:fld>
             <a:endParaRPr lang="en-US"/>
           </a:p>
@@ -5569,58 +6014,40 @@
               </a:defRPr>
             </a:pPr>
             <a:r>
+              <a:rPr lang="en-GB" sz="5400" b="1" strike="sngStrike" dirty="0">
+                <a:solidFill>
+                  <a:srgbClr val="000000"/>
+                </a:solidFill>
+              </a:rPr>
+              <a:t>5</a:t>
+            </a:r>
+            <a:r>
               <a:rPr lang="en-GB" sz="5400" b="1" dirty="0">
                 <a:solidFill>
                   <a:srgbClr val="000000"/>
                 </a:solidFill>
               </a:rPr>
-              <a:t>5 AI Agent Terms You Need to Know</a:t>
-            </a:r>
-          </a:p>
-        </p:txBody>
-      </p:sp>
-      <p:sp>
-        <p:nvSpPr>
-          <p:cNvPr id="103" name="Rectangle 104"/>
-          <p:cNvSpPr>
-            <a:spLocks noGrp="1"/>
-          </p:cNvSpPr>
-          <p:nvPr/>
-        </p:nvSpPr>
-        <p:spPr>
-          <a:xfrm>
-            <a:off x="400050" y="4593333"/>
-            <a:ext cx="1847850" cy="76200"/>
-          </a:xfrm>
-          <a:prstGeom prst="rect">
-            <a:avLst/>
-          </a:prstGeom>
-          <a:solidFill>
-            <a:srgbClr val="FF6B35"/>
-          </a:solidFill>
-          <a:ln w="0">
-            <a:noFill/>
-            <a:prstDash val="solid"/>
-          </a:ln>
-        </p:spPr>
-        <p:txBody>
-          <a:bodyPr/>
-          <a:lstStyle/>
-          <a:p>
-            <a:endParaRPr lang="en-GB"/>
-          </a:p>
-        </p:txBody>
-      </p:sp>
-      <p:sp>
-        <p:nvSpPr>
-          <p:cNvPr id="105" name="TextBox 106"/>
+              <a:t> AI Agent Terms You Need to Know</a:t>
+            </a:r>
+          </a:p>
+        </p:txBody>
+      </p:sp>
+      <p:sp>
+        <p:nvSpPr>
+          <p:cNvPr id="3" name="TextBox 2">
+            <a:extLst>
+              <a:ext uri="{FF2B5EF4-FFF2-40B4-BE49-F238E27FC236}">
+                <a16:creationId xmlns:a16="http://schemas.microsoft.com/office/drawing/2014/main" id="{FA11D1AB-469B-7553-FAE3-003BC17D1564}"/>
+              </a:ext>
+            </a:extLst>
+          </p:cNvPr>
           <p:cNvSpPr txBox="1"/>
           <p:nvPr/>
         </p:nvSpPr>
         <p:spPr>
           <a:xfrm>
-            <a:off x="400050" y="4993333"/>
-            <a:ext cx="7400000" cy="800000"/>
+            <a:off x="548640" y="4572000"/>
+            <a:ext cx="8778240" cy="974434"/>
           </a:xfrm>
           <a:prstGeom prst="rect">
             <a:avLst/>
@@ -5629,26 +6056,55 @@
         </p:spPr>
         <p:txBody>
           <a:bodyPr wrap="square" lIns="0" tIns="0" rIns="0" bIns="0" anchor="t">
-            <a:noAutofit/>
+            <a:spAutoFit/>
           </a:bodyPr>
           <a:lstStyle/>
           <a:p>
             <a:pPr algn="l">
-              <a:buNone/>
-              <a:defRPr sz="4000" b="0">
-                <a:solidFill>
-                  <a:srgbClr val="222222"/>
-                </a:solidFill>
-              </a:defRPr>
+              <a:lnSpc>
+                <a:spcPct val="140000"/>
+              </a:lnSpc>
             </a:pPr>
             <a:r>
-              <a:rPr lang="en-GB" sz="4000" b="0" dirty="0">
-                <a:solidFill>
-                  <a:srgbClr val="222222"/>
-                </a:solidFill>
-              </a:rPr>
-              <a:t>Devlin Duldulao</a:t>
-            </a:r>
+              <a:rPr lang="en-US" sz="2400" b="0" i="0" dirty="0">
+                <a:solidFill>
+                  <a:schemeClr val="tx1">
+                    <a:lumMod val="95000"/>
+                    <a:lumOff val="5000"/>
+                  </a:schemeClr>
+                </a:solidFill>
+                <a:latin typeface="Helvetica Neue"/>
+              </a:rPr>
+              <a:t>@DevlinDuldulao</a:t>
+            </a:r>
+          </a:p>
+          <a:p>
+            <a:pPr algn="l">
+              <a:lnSpc>
+                <a:spcPct val="140000"/>
+              </a:lnSpc>
+            </a:pPr>
+            <a:r>
+              <a:rPr lang="en-US" sz="2400" dirty="0">
+                <a:solidFill>
+                  <a:schemeClr val="tx1">
+                    <a:lumMod val="95000"/>
+                    <a:lumOff val="5000"/>
+                  </a:schemeClr>
+                </a:solidFill>
+                <a:latin typeface="Helvetica Neue"/>
+              </a:rPr>
+              <a:t>Senior consultant at SoftwareOne Norway</a:t>
+            </a:r>
+            <a:endParaRPr sz="2400" b="0" i="0" dirty="0">
+              <a:solidFill>
+                <a:schemeClr val="tx1">
+                  <a:lumMod val="95000"/>
+                  <a:lumOff val="5000"/>
+                </a:schemeClr>
+              </a:solidFill>
+              <a:latin typeface="Helvetica Neue"/>
+            </a:endParaRPr>
           </a:p>
         </p:txBody>
       </p:sp>
@@ -15466,7 +15922,7 @@
                   <a:srgbClr val="222222"/>
                 </a:solidFill>
               </a:rPr>
-              <a:t>Protocol is the envelope</a:t>
+              <a:t>Protocol is JSON-RPC 2.0</a:t>
             </a:r>
           </a:p>
         </p:txBody>
@@ -18457,6 +18913,146 @@
           <a:chExt cx="0" cy="0"/>
         </a:xfrm>
       </p:grpSpPr>
+      <p:sp>
+        <p:nvSpPr>
+          <p:cNvPr id="2" name="TextBox 1">
+            <a:extLst>
+              <a:ext uri="{FF2B5EF4-FFF2-40B4-BE49-F238E27FC236}">
+                <a16:creationId xmlns:a16="http://schemas.microsoft.com/office/drawing/2014/main" id="{4A1DBC24-DF7C-D482-94CD-D646C9C04EB7}"/>
+              </a:ext>
+            </a:extLst>
+          </p:cNvPr>
+          <p:cNvSpPr txBox="1"/>
+          <p:nvPr/>
+        </p:nvSpPr>
+        <p:spPr>
+          <a:xfrm>
+            <a:off x="1024780" y="2274838"/>
+            <a:ext cx="10142440" cy="2308324"/>
+          </a:xfrm>
+          <a:prstGeom prst="rect">
+            <a:avLst/>
+          </a:prstGeom>
+          <a:noFill/>
+        </p:spPr>
+        <p:txBody>
+          <a:bodyPr wrap="square" rtlCol="0">
+            <a:spAutoFit/>
+          </a:bodyPr>
+          <a:lstStyle/>
+          <a:p>
+            <a:r>
+              <a:rPr lang="en-US" sz="3600" dirty="0"/>
+              <a:t>An </a:t>
+            </a:r>
+            <a:r>
+              <a:rPr lang="en-US" sz="3600" b="1" u="sng" dirty="0"/>
+              <a:t>agentic harness </a:t>
+            </a:r>
+            <a:r>
+              <a:rPr lang="en-US" sz="3600" dirty="0"/>
+              <a:t>is the runtime and control layer around an AI model that gives it tools, context, execution, feedback, and guardrails so it can autonomously complete multi-step tasks.</a:t>
+            </a:r>
+            <a:endParaRPr lang="en-GB" sz="3600" dirty="0"/>
+          </a:p>
+        </p:txBody>
+      </p:sp>
+    </p:spTree>
+    <p:extLst>
+      <p:ext uri="{BB962C8B-B14F-4D97-AF65-F5344CB8AC3E}">
+        <p14:creationId xmlns:p14="http://schemas.microsoft.com/office/powerpoint/2010/main" val="2896134027"/>
+      </p:ext>
+    </p:extLst>
+  </p:cSld>
+  <p:clrMapOvr>
+    <a:masterClrMapping/>
+  </p:clrMapOvr>
+</p:sld>
+</file>
+
+<file path=ppt/slides/slide44.xml><?xml version="1.0" encoding="utf-8"?>
+<p:sld xmlns:a="http://schemas.openxmlformats.org/drawingml/2006/main" xmlns:r="http://schemas.openxmlformats.org/officeDocument/2006/relationships" xmlns:p="http://schemas.openxmlformats.org/presentationml/2006/main">
+  <p:cSld>
+    <p:spTree>
+      <p:nvGrpSpPr>
+        <p:cNvPr id="1" name=""/>
+        <p:cNvGrpSpPr/>
+        <p:nvPr/>
+      </p:nvGrpSpPr>
+      <p:grpSpPr>
+        <a:xfrm>
+          <a:off x="0" y="0"/>
+          <a:ext cx="0" cy="0"/>
+          <a:chOff x="0" y="0"/>
+          <a:chExt cx="0" cy="0"/>
+        </a:xfrm>
+      </p:grpSpPr>
+      <p:pic>
+        <p:nvPicPr>
+          <p:cNvPr id="3" name="Picture 2">
+            <a:extLst>
+              <a:ext uri="{FF2B5EF4-FFF2-40B4-BE49-F238E27FC236}">
+                <a16:creationId xmlns:a16="http://schemas.microsoft.com/office/drawing/2014/main" id="{82E869F8-FC6A-4356-F580-26768AA9EB60}"/>
+              </a:ext>
+            </a:extLst>
+          </p:cNvPr>
+          <p:cNvPicPr>
+            <a:picLocks noChangeAspect="1"/>
+          </p:cNvPicPr>
+          <p:nvPr/>
+        </p:nvPicPr>
+        <p:blipFill>
+          <a:blip r:embed="rId3">
+            <a:extLst>
+              <a:ext uri="{28A0092B-C50C-407E-A947-70E740481C1C}">
+                <a14:useLocalDpi xmlns:a14="http://schemas.microsoft.com/office/drawing/2010/main" val="0"/>
+              </a:ext>
+            </a:extLst>
+          </a:blip>
+          <a:stretch>
+            <a:fillRect/>
+          </a:stretch>
+        </p:blipFill>
+        <p:spPr>
+          <a:xfrm>
+            <a:off x="7958" y="0"/>
+            <a:ext cx="12176084" cy="6858000"/>
+          </a:xfrm>
+          <a:prstGeom prst="rect">
+            <a:avLst/>
+          </a:prstGeom>
+        </p:spPr>
+      </p:pic>
+    </p:spTree>
+    <p:extLst>
+      <p:ext uri="{BB962C8B-B14F-4D97-AF65-F5344CB8AC3E}">
+        <p14:creationId xmlns:p14="http://schemas.microsoft.com/office/powerpoint/2010/main" val="2095223310"/>
+      </p:ext>
+    </p:extLst>
+  </p:cSld>
+  <p:clrMapOvr>
+    <a:masterClrMapping/>
+  </p:clrMapOvr>
+</p:sld>
+</file>
+
+<file path=ppt/slides/slide45.xml><?xml version="1.0" encoding="utf-8"?>
+<p:sld xmlns:a="http://schemas.openxmlformats.org/drawingml/2006/main" xmlns:r="http://schemas.openxmlformats.org/officeDocument/2006/relationships" xmlns:p="http://schemas.openxmlformats.org/presentationml/2006/main">
+  <p:cSld>
+    <p:spTree>
+      <p:nvGrpSpPr>
+        <p:cNvPr id="1" name=""/>
+        <p:cNvGrpSpPr/>
+        <p:nvPr/>
+      </p:nvGrpSpPr>
+      <p:grpSpPr>
+        <a:xfrm>
+          <a:off x="0" y="0"/>
+          <a:ext cx="0" cy="0"/>
+          <a:chOff x="0" y="0"/>
+          <a:chExt cx="0" cy="0"/>
+        </a:xfrm>
+      </p:grpSpPr>
       <p:pic>
         <p:nvPicPr>
           <p:cNvPr id="5" name="Picture 4">
@@ -18500,7 +19096,95 @@
 </p:sld>
 </file>
 
-<file path=ppt/slides/slide44.xml><?xml version="1.0" encoding="utf-8"?>
+<file path=ppt/slides/slide46.xml><?xml version="1.0" encoding="utf-8"?>
+<p:sld xmlns:a="http://schemas.openxmlformats.org/drawingml/2006/main" xmlns:r="http://schemas.openxmlformats.org/officeDocument/2006/relationships" xmlns:p="http://schemas.openxmlformats.org/presentationml/2006/main">
+  <p:cSld>
+    <p:spTree>
+      <p:nvGrpSpPr>
+        <p:cNvPr id="1" name="">
+          <a:extLst>
+            <a:ext uri="{FF2B5EF4-FFF2-40B4-BE49-F238E27FC236}">
+              <a16:creationId xmlns:a16="http://schemas.microsoft.com/office/drawing/2014/main" id="{91F1A212-8E57-6816-E45C-C202E54FFB15}"/>
+            </a:ext>
+          </a:extLst>
+        </p:cNvPr>
+        <p:cNvGrpSpPr/>
+        <p:nvPr/>
+      </p:nvGrpSpPr>
+      <p:grpSpPr>
+        <a:xfrm>
+          <a:off x="0" y="0"/>
+          <a:ext cx="0" cy="0"/>
+          <a:chOff x="0" y="0"/>
+          <a:chExt cx="0" cy="0"/>
+        </a:xfrm>
+      </p:grpSpPr>
+      <p:sp>
+        <p:nvSpPr>
+          <p:cNvPr id="6" name="TextBox 5">
+            <a:extLst>
+              <a:ext uri="{FF2B5EF4-FFF2-40B4-BE49-F238E27FC236}">
+                <a16:creationId xmlns:a16="http://schemas.microsoft.com/office/drawing/2014/main" id="{FDFC6324-4D3C-F263-D3FB-B7304428462B}"/>
+              </a:ext>
+            </a:extLst>
+          </p:cNvPr>
+          <p:cNvSpPr txBox="1"/>
+          <p:nvPr/>
+        </p:nvSpPr>
+        <p:spPr>
+          <a:xfrm>
+            <a:off x="1119674" y="2736502"/>
+            <a:ext cx="10030408" cy="1384995"/>
+          </a:xfrm>
+          <a:prstGeom prst="rect">
+            <a:avLst/>
+          </a:prstGeom>
+          <a:noFill/>
+        </p:spPr>
+        <p:txBody>
+          <a:bodyPr wrap="square">
+            <a:spAutoFit/>
+          </a:bodyPr>
+          <a:lstStyle/>
+          <a:p>
+            <a:r>
+              <a:rPr lang="en-GB" sz="2800" b="1" dirty="0">
+                <a:solidFill>
+                  <a:schemeClr val="tx1">
+                    <a:lumMod val="95000"/>
+                    <a:lumOff val="5000"/>
+                  </a:schemeClr>
+                </a:solidFill>
+              </a:rPr>
+              <a:t>Knowledge atrophy </a:t>
+            </a:r>
+            <a:r>
+              <a:rPr lang="en-GB" sz="2800" dirty="0">
+                <a:solidFill>
+                  <a:schemeClr val="bg2">
+                    <a:lumMod val="25000"/>
+                  </a:schemeClr>
+                </a:solidFill>
+              </a:rPr>
+              <a:t>is the gradual weakening of human thinking and problem-solving skills through overreliance on AI to do our mental work.</a:t>
+            </a:r>
+          </a:p>
+        </p:txBody>
+      </p:sp>
+    </p:spTree>
+    <p:extLst>
+      <p:ext uri="{BB962C8B-B14F-4D97-AF65-F5344CB8AC3E}">
+        <p14:creationId xmlns:p14="http://schemas.microsoft.com/office/powerpoint/2010/main" val="1771380820"/>
+      </p:ext>
+    </p:extLst>
+  </p:cSld>
+  <p:clrMapOvr>
+    <a:masterClrMapping/>
+  </p:clrMapOvr>
+</p:sld>
+</file>
+
+<file path=ppt/slides/slide47.xml><?xml version="1.0" encoding="utf-8"?>
 <p:sld xmlns:a="http://schemas.openxmlformats.org/drawingml/2006/main" xmlns:r="http://schemas.openxmlformats.org/officeDocument/2006/relationships" xmlns:p="http://schemas.openxmlformats.org/presentationml/2006/main">
   <p:cSld>
     <p:spTree>
